--- a/output/week15/Week15_Presentation_BICT3202_OOAD.pptx
+++ b/output/week15/Week15_Presentation_BICT3202_OOAD.pptx
@@ -4586,7 +4586,7 @@
                 </a:solidFill>
                 <a:latin typeface="Open Sans"/>
               </a:rPr>
-              <a:t>Controller → Service → Domain → Repository</a:t>
+              <a:t>Controller -&gt; Service -&gt; Domain -&gt; Repository</a:t>
             </a:r>
           </a:p>
         </p:txBody>
@@ -7112,7 +7112,7 @@
                 </a:solidFill>
                 <a:latin typeface="Open Sans"/>
               </a:rPr>
-              <a:t>Presentation → Application → Domain → Persistence</a:t>
+              <a:t>Presentation -&gt; Application -&gt; Domain -&gt; Persistence</a:t>
             </a:r>
           </a:p>
         </p:txBody>
@@ -8762,7 +8762,7 @@
                 </a:solidFill>
                 <a:latin typeface="Open Sans"/>
               </a:rPr>
-              <a:t>Use Case ↔ Class: </a:t>
+              <a:t>Use Case &lt;- Class: </a:t>
             </a:r>
             <a:r>
               <a:rPr sz="1600">
@@ -8799,7 +8799,7 @@
                 </a:solidFill>
                 <a:latin typeface="Open Sans"/>
               </a:rPr>
-              <a:t>Class ↔ Sequence: </a:t>
+              <a:t>Class &lt;- Sequence: </a:t>
             </a:r>
             <a:r>
               <a:rPr sz="1600">
@@ -8836,7 +8836,7 @@
                 </a:solidFill>
                 <a:latin typeface="Open Sans"/>
               </a:rPr>
-              <a:t>Sequence ↔ State: </a:t>
+              <a:t>Sequence &lt;- State: </a:t>
             </a:r>
             <a:r>
               <a:rPr sz="1600">
@@ -8873,7 +8873,7 @@
                 </a:solidFill>
                 <a:latin typeface="Open Sans"/>
               </a:rPr>
-              <a:t>Activity ↔ Sequence: </a:t>
+              <a:t>Activity &lt;- Sequence: </a:t>
             </a:r>
             <a:r>
               <a:rPr sz="1600">
@@ -8910,7 +8910,7 @@
                 </a:solidFill>
                 <a:latin typeface="Open Sans"/>
               </a:rPr>
-              <a:t>Class ↔ Component: </a:t>
+              <a:t>Class &lt;- Component: </a:t>
             </a:r>
             <a:r>
               <a:rPr sz="1600">
@@ -8947,7 +8947,7 @@
                 </a:solidFill>
                 <a:latin typeface="Open Sans"/>
               </a:rPr>
-              <a:t>Requirements ↔ Design: </a:t>
+              <a:t>Requirements &lt;- Design: </a:t>
             </a:r>
             <a:r>
               <a:rPr sz="1600">
@@ -10669,7 +10669,7 @@
                 </a:solidFill>
                 <a:latin typeface="Open Sans"/>
               </a:rPr>
-              <a:t>Understand Problem → Model → Design, then use the tool.</a:t>
+              <a:t>Understand Problem -&gt; Model -&gt; Design, then use the tool.</a:t>
             </a:r>
           </a:p>
         </p:txBody>
@@ -11090,7 +11090,7 @@
                 </a:solidFill>
                 <a:latin typeface="Open Sans"/>
               </a:rPr>
-              <a:t>Actors → Use cases → Analysis → Class/Dynamic/Behaviour → Design → Implementation.</a:t>
+              <a:t>Actors -&gt; Use cases -&gt; Analysis -&gt; Class/Dynamic/Behaviour -&gt; Design -&gt; Implementation.</a:t>
             </a:r>
           </a:p>
         </p:txBody>
@@ -11538,7 +11538,7 @@
                 </a:solidFill>
                 <a:latin typeface="Open Sans"/>
               </a:rPr>
-              <a:t>Requirement → Use Case → Class → Interaction → Behaviour → Design → Components → Documentation.</a:t>
+              <a:t>Requirement -&gt; Use Case -&gt; Class -&gt; Interaction -&gt; Behaviour -&gt; Design -&gt; Components -&gt; Documentation.</a:t>
             </a:r>
           </a:p>
         </p:txBody>
@@ -12103,7 +12103,7 @@
                 </a:solidFill>
                 <a:latin typeface="Poppins"/>
               </a:rPr>
-              <a:t>Week 14 → Week 15</a:t>
+              <a:t>Week 14 -&gt; Week 15</a:t>
             </a:r>
           </a:p>
         </p:txBody>
